--- a/dist/weeks-포트폴리오제작/포트폴리오제작_09주차_비주얼아이덴티티.pptx
+++ b/dist/weeks-포트폴리오제작/포트폴리오제작_09주차_비주얼아이덴티티.pptx
@@ -2333,7 +2333,7 @@
                 <a:ea typeface="Pretendard" pitchFamily="34" charset="-122"/>
                 <a:cs typeface="Pretendard" pitchFamily="34" charset="-120"/>
               </a:rPr>
-              <a:t>90분 — 강의 25분 · 무드보드 35분 · 그리드 설계 30분</a:t>
+              <a:t>120분 — 강의 25분 · 무드보드 40분 · 그리드 설계 35분 · 정리 10분</a:t>
             </a:r>
             <a:endParaRPr lang="en-US" sz="1200" dirty="0"/>
           </a:p>
@@ -2766,7 +2766,7 @@
                 <a:ea typeface="Pretendard" pitchFamily="34" charset="-122"/>
                 <a:cs typeface="Pretendard" pitchFamily="34" charset="-120"/>
               </a:rPr>
-              <a:t>65분 · 개인 — 두 개를 이어서 만듭니다.</a:t>
+              <a:t>75분 · 개인 — 두 개를 이어서 만듭니다. 사이에 휴식이 한 번 들어갑니다.</a:t>
             </a:r>
             <a:endParaRPr lang="en-US" sz="1150" dirty="0"/>
           </a:p>
@@ -2830,7 +2830,7 @@
                 <a:ea typeface="Pretendard Light" pitchFamily="34" charset="-122"/>
                 <a:cs typeface="Pretendard Light" pitchFamily="34" charset="-120"/>
               </a:rPr>
-              <a:t>10분</a:t>
+              <a:t>12분</a:t>
             </a:r>
             <a:endParaRPr lang="en-US" sz="2200" dirty="0"/>
           </a:p>
@@ -2975,7 +2975,7 @@
                 <a:ea typeface="Pretendard Light" pitchFamily="34" charset="-122"/>
                 <a:cs typeface="Pretendard Light" pitchFamily="34" charset="-120"/>
               </a:rPr>
-              <a:t>25분</a:t>
+              <a:t>28분</a:t>
             </a:r>
             <a:endParaRPr lang="en-US" sz="2200" dirty="0"/>
           </a:p>
@@ -3120,7 +3120,7 @@
                 <a:ea typeface="Pretendard Light" pitchFamily="34" charset="-122"/>
                 <a:cs typeface="Pretendard Light" pitchFamily="34" charset="-120"/>
               </a:rPr>
-              <a:t>20분</a:t>
+              <a:t>25분</a:t>
             </a:r>
             <a:endParaRPr lang="en-US" sz="2200" dirty="0"/>
           </a:p>
@@ -4893,7 +4893,7 @@
                 <a:ea typeface="Pretendard Black" pitchFamily="34" charset="-122"/>
                 <a:cs typeface="Pretendard Black" pitchFamily="34" charset="-120"/>
               </a:rPr>
-              <a:t>오늘의 90분</a:t>
+              <a:t>오늘의 120분</a:t>
             </a:r>
             <a:endParaRPr lang="en-US" sz="3000" dirty="0"/>
           </a:p>
@@ -4932,7 +4932,7 @@
                 <a:ea typeface="Pretendard" pitchFamily="34" charset="-122"/>
                 <a:cs typeface="Pretendard" pitchFamily="34" charset="-120"/>
               </a:rPr>
-              <a:t>강의 25분 · 무드보드 35분 · 그리드 설계 30분</a:t>
+              <a:t>강의 25분 · 무드보드 40분 · 그리드 설계 35분 · 정리 10분</a:t>
             </a:r>
             <a:endParaRPr lang="en-US" sz="1150" dirty="0"/>
           </a:p>
@@ -4972,7 +4972,7 @@
         <p:spPr>
           <a:xfrm>
             <a:off x="640080" y="1719072"/>
-            <a:ext cx="1600200" cy="932688"/>
+            <a:ext cx="1600200" cy="830275"/>
           </a:xfrm>
           <a:prstGeom prst="rect">
             <a:avLst/>
@@ -5011,7 +5011,7 @@
         <p:spPr>
           <a:xfrm>
             <a:off x="2377440" y="1719072"/>
-            <a:ext cx="6888175" cy="932688"/>
+            <a:ext cx="6888175" cy="830275"/>
           </a:xfrm>
           <a:prstGeom prst="rect">
             <a:avLst/>
@@ -5050,7 +5050,7 @@
         <p:spPr>
           <a:xfrm>
             <a:off x="9265615" y="1719072"/>
-            <a:ext cx="2286000" cy="932688"/>
+            <a:ext cx="2286000" cy="830275"/>
           </a:xfrm>
           <a:prstGeom prst="rect">
             <a:avLst/>
@@ -5088,7 +5088,7 @@
         </p:nvSpPr>
         <p:spPr>
           <a:xfrm>
-            <a:off x="640080" y="2633472"/>
+            <a:off x="640080" y="2531059"/>
             <a:ext cx="10911535" cy="7315"/>
           </a:xfrm>
           <a:prstGeom prst="rect">
@@ -5113,8 +5113,8 @@
         </p:nvSpPr>
         <p:spPr>
           <a:xfrm>
-            <a:off x="640080" y="2651760"/>
-            <a:ext cx="1600200" cy="932688"/>
+            <a:off x="640080" y="2549347"/>
+            <a:ext cx="1600200" cy="830275"/>
           </a:xfrm>
           <a:prstGeom prst="rect">
             <a:avLst/>
@@ -5138,7 +5138,7 @@
                 <a:ea typeface="Pretendard" pitchFamily="34" charset="-122"/>
                 <a:cs typeface="Pretendard" pitchFamily="34" charset="-120"/>
               </a:rPr>
-              <a:t>00:25–01:00</a:t>
+              <a:t>00:25–01:05</a:t>
             </a:r>
             <a:endParaRPr lang="en-US" sz="1050" dirty="0"/>
           </a:p>
@@ -5152,8 +5152,8 @@
         </p:nvSpPr>
         <p:spPr>
           <a:xfrm>
-            <a:off x="2377440" y="2651760"/>
-            <a:ext cx="6888175" cy="932688"/>
+            <a:off x="2377440" y="2549347"/>
+            <a:ext cx="6888175" cy="830275"/>
           </a:xfrm>
           <a:prstGeom prst="rect">
             <a:avLst/>
@@ -5177,7 +5177,7 @@
                 <a:ea typeface="Pretendard" pitchFamily="34" charset="-122"/>
                 <a:cs typeface="Pretendard" pitchFamily="34" charset="-120"/>
               </a:rPr>
-              <a:t>무드보드 제작 실습</a:t>
+              <a:t>실습 1 — 무드보드 제작</a:t>
             </a:r>
             <a:endParaRPr lang="en-US" sz="1300" dirty="0"/>
           </a:p>
@@ -5191,8 +5191,8 @@
         </p:nvSpPr>
         <p:spPr>
           <a:xfrm>
-            <a:off x="9265615" y="2651760"/>
-            <a:ext cx="2286000" cy="932688"/>
+            <a:off x="9265615" y="2549347"/>
+            <a:ext cx="2286000" cy="830275"/>
           </a:xfrm>
           <a:prstGeom prst="rect">
             <a:avLst/>
@@ -5230,7 +5230,7 @@
         </p:nvSpPr>
         <p:spPr>
           <a:xfrm>
-            <a:off x="640080" y="3566160"/>
+            <a:off x="640080" y="3361334"/>
             <a:ext cx="10911535" cy="7315"/>
           </a:xfrm>
           <a:prstGeom prst="rect">
@@ -5255,8 +5255,111 @@
         </p:nvSpPr>
         <p:spPr>
           <a:xfrm>
-            <a:off x="640080" y="3584448"/>
-            <a:ext cx="1600200" cy="932688"/>
+            <a:off x="640080" y="3379622"/>
+            <a:ext cx="1600200" cy="830275"/>
+          </a:xfrm>
+          <a:prstGeom prst="rect">
+            <a:avLst/>
+          </a:prstGeom>
+          <a:noFill/>
+          <a:ln/>
+        </p:spPr>
+        <p:txBody>
+          <a:bodyPr wrap="square" lIns="0" tIns="0" rIns="0" bIns="0" rtlCol="0" anchor="ctr"/>
+          <a:lstStyle/>
+          <a:p>
+            <a:pPr indent="0" marL="0">
+              <a:buNone/>
+            </a:pPr>
+            <a:r>
+              <a:rPr lang="en-US" sz="1050" spc="60" kern="0" dirty="0">
+                <a:solidFill>
+                  <a:srgbClr val="9B9B9B"/>
+                </a:solidFill>
+                <a:latin typeface="Pretendard" pitchFamily="34" charset="0"/>
+                <a:ea typeface="Pretendard" pitchFamily="34" charset="-122"/>
+                <a:cs typeface="Pretendard" pitchFamily="34" charset="-120"/>
+              </a:rPr>
+              <a:t>01:05–01:15</a:t>
+            </a:r>
+            <a:endParaRPr lang="en-US" sz="1050" dirty="0"/>
+          </a:p>
+        </p:txBody>
+      </p:sp>
+      <p:sp>
+        <p:nvSpPr>
+          <p:cNvPr id="19" name="Text 17"/>
+          <p:cNvSpPr/>
+          <p:nvPr/>
+        </p:nvSpPr>
+        <p:spPr>
+          <a:xfrm>
+            <a:off x="2377440" y="3379622"/>
+            <a:ext cx="6888175" cy="830275"/>
+          </a:xfrm>
+          <a:prstGeom prst="rect">
+            <a:avLst/>
+          </a:prstGeom>
+          <a:noFill/>
+          <a:ln/>
+        </p:spPr>
+        <p:txBody>
+          <a:bodyPr wrap="square" lIns="0" tIns="0" rIns="0" bIns="0" rtlCol="0" anchor="ctr"/>
+          <a:lstStyle/>
+          <a:p>
+            <a:pPr indent="0" marL="0">
+              <a:buNone/>
+            </a:pPr>
+            <a:r>
+              <a:rPr lang="en-US" sz="1100" dirty="0">
+                <a:solidFill>
+                  <a:srgbClr val="9B9B9B"/>
+                </a:solidFill>
+                <a:latin typeface="Pretendard" pitchFamily="34" charset="0"/>
+                <a:ea typeface="Pretendard" pitchFamily="34" charset="-122"/>
+                <a:cs typeface="Pretendard" pitchFamily="34" charset="-120"/>
+              </a:rPr>
+              <a:t>휴식</a:t>
+            </a:r>
+            <a:endParaRPr lang="en-US" sz="1100" dirty="0"/>
+          </a:p>
+        </p:txBody>
+      </p:sp>
+      <p:sp>
+        <p:nvSpPr>
+          <p:cNvPr id="20" name="Shape 18"/>
+          <p:cNvSpPr/>
+          <p:nvPr/>
+        </p:nvSpPr>
+        <p:spPr>
+          <a:xfrm>
+            <a:off x="640080" y="4191610"/>
+            <a:ext cx="10911535" cy="7315"/>
+          </a:xfrm>
+          <a:prstGeom prst="rect">
+            <a:avLst/>
+          </a:prstGeom>
+          <a:solidFill>
+            <a:srgbClr val="EFEFEF"/>
+          </a:solidFill>
+          <a:ln w="12700">
+            <a:solidFill>
+              <a:srgbClr val="EFEFEF"/>
+            </a:solidFill>
+            <a:prstDash val="solid"/>
+          </a:ln>
+        </p:spPr>
+      </p:sp>
+      <p:sp>
+        <p:nvSpPr>
+          <p:cNvPr id="21" name="Text 19"/>
+          <p:cNvSpPr/>
+          <p:nvPr/>
+        </p:nvSpPr>
+        <p:spPr>
+          <a:xfrm>
+            <a:off x="640080" y="4209898"/>
+            <a:ext cx="1600200" cy="830275"/>
           </a:xfrm>
           <a:prstGeom prst="rect">
             <a:avLst/>
@@ -5280,7 +5383,7 @@
                 <a:ea typeface="Pretendard" pitchFamily="34" charset="-122"/>
                 <a:cs typeface="Pretendard" pitchFamily="34" charset="-120"/>
               </a:rPr>
-              <a:t>01:00–01:30</a:t>
+              <a:t>01:15–01:50</a:t>
             </a:r>
             <a:endParaRPr lang="en-US" sz="1050" dirty="0"/>
           </a:p>
@@ -5288,14 +5391,14 @@
       </p:sp>
       <p:sp>
         <p:nvSpPr>
-          <p:cNvPr id="19" name="Text 17"/>
-          <p:cNvSpPr/>
-          <p:nvPr/>
-        </p:nvSpPr>
-        <p:spPr>
-          <a:xfrm>
-            <a:off x="2377440" y="3584448"/>
-            <a:ext cx="6888175" cy="932688"/>
+          <p:cNvPr id="22" name="Text 20"/>
+          <p:cNvSpPr/>
+          <p:nvPr/>
+        </p:nvSpPr>
+        <p:spPr>
+          <a:xfrm>
+            <a:off x="2377440" y="4209898"/>
+            <a:ext cx="6888175" cy="830275"/>
           </a:xfrm>
           <a:prstGeom prst="rect">
             <a:avLst/>
@@ -5319,7 +5422,7 @@
                 <a:ea typeface="Pretendard" pitchFamily="34" charset="-122"/>
                 <a:cs typeface="Pretendard" pitchFamily="34" charset="-120"/>
               </a:rPr>
-              <a:t>그리드 시스템 설계</a:t>
+              <a:t>실습 2 — 그리드 시스템 설계</a:t>
             </a:r>
             <a:endParaRPr lang="en-US" sz="1300" dirty="0"/>
           </a:p>
@@ -5327,14 +5430,14 @@
       </p:sp>
       <p:sp>
         <p:nvSpPr>
-          <p:cNvPr id="20" name="Text 18"/>
-          <p:cNvSpPr/>
-          <p:nvPr/>
-        </p:nvSpPr>
-        <p:spPr>
-          <a:xfrm>
-            <a:off x="9265615" y="3584448"/>
-            <a:ext cx="2286000" cy="932688"/>
+          <p:cNvPr id="23" name="Text 21"/>
+          <p:cNvSpPr/>
+          <p:nvPr/>
+        </p:nvSpPr>
+        <p:spPr>
+          <a:xfrm>
+            <a:off x="9265615" y="4209898"/>
+            <a:ext cx="2286000" cy="830275"/>
           </a:xfrm>
           <a:prstGeom prst="rect">
             <a:avLst/>
@@ -5366,14 +5469,156 @@
       </p:sp>
       <p:sp>
         <p:nvSpPr>
-          <p:cNvPr id="21" name="Shape 19"/>
-          <p:cNvSpPr/>
-          <p:nvPr/>
-        </p:nvSpPr>
-        <p:spPr>
-          <a:xfrm>
-            <a:off x="640080" y="4828032"/>
-            <a:ext cx="10911535" cy="969264"/>
+          <p:cNvPr id="24" name="Shape 22"/>
+          <p:cNvSpPr/>
+          <p:nvPr/>
+        </p:nvSpPr>
+        <p:spPr>
+          <a:xfrm>
+            <a:off x="640080" y="5021885"/>
+            <a:ext cx="10911535" cy="7315"/>
+          </a:xfrm>
+          <a:prstGeom prst="rect">
+            <a:avLst/>
+          </a:prstGeom>
+          <a:solidFill>
+            <a:srgbClr val="DCDCDC"/>
+          </a:solidFill>
+          <a:ln w="12700">
+            <a:solidFill>
+              <a:srgbClr val="DCDCDC"/>
+            </a:solidFill>
+            <a:prstDash val="solid"/>
+          </a:ln>
+        </p:spPr>
+      </p:sp>
+      <p:sp>
+        <p:nvSpPr>
+          <p:cNvPr id="25" name="Text 23"/>
+          <p:cNvSpPr/>
+          <p:nvPr/>
+        </p:nvSpPr>
+        <p:spPr>
+          <a:xfrm>
+            <a:off x="640080" y="5040173"/>
+            <a:ext cx="1600200" cy="830275"/>
+          </a:xfrm>
+          <a:prstGeom prst="rect">
+            <a:avLst/>
+          </a:prstGeom>
+          <a:noFill/>
+          <a:ln/>
+        </p:spPr>
+        <p:txBody>
+          <a:bodyPr wrap="square" lIns="0" tIns="0" rIns="0" bIns="0" rtlCol="0" anchor="ctr"/>
+          <a:lstStyle/>
+          <a:p>
+            <a:pPr indent="0" marL="0">
+              <a:buNone/>
+            </a:pPr>
+            <a:r>
+              <a:rPr lang="en-US" sz="1050" b="1" spc="60" kern="0" dirty="0">
+                <a:solidFill>
+                  <a:srgbClr val="111111"/>
+                </a:solidFill>
+                <a:latin typeface="Pretendard" pitchFamily="34" charset="0"/>
+                <a:ea typeface="Pretendard" pitchFamily="34" charset="-122"/>
+                <a:cs typeface="Pretendard" pitchFamily="34" charset="-120"/>
+              </a:rPr>
+              <a:t>01:50–02:00</a:t>
+            </a:r>
+            <a:endParaRPr lang="en-US" sz="1050" dirty="0"/>
+          </a:p>
+        </p:txBody>
+      </p:sp>
+      <p:sp>
+        <p:nvSpPr>
+          <p:cNvPr id="26" name="Text 24"/>
+          <p:cNvSpPr/>
+          <p:nvPr/>
+        </p:nvSpPr>
+        <p:spPr>
+          <a:xfrm>
+            <a:off x="2377440" y="5040173"/>
+            <a:ext cx="6888175" cy="830275"/>
+          </a:xfrm>
+          <a:prstGeom prst="rect">
+            <a:avLst/>
+          </a:prstGeom>
+          <a:noFill/>
+          <a:ln/>
+        </p:spPr>
+        <p:txBody>
+          <a:bodyPr wrap="square" lIns="0" tIns="0" rIns="0" bIns="0" rtlCol="0" anchor="ctr"/>
+          <a:lstStyle/>
+          <a:p>
+            <a:pPr indent="0" marL="0">
+              <a:buNone/>
+            </a:pPr>
+            <a:r>
+              <a:rPr lang="en-US" sz="1300" b="1" dirty="0">
+                <a:solidFill>
+                  <a:srgbClr val="111111"/>
+                </a:solidFill>
+                <a:latin typeface="Pretendard" pitchFamily="34" charset="0"/>
+                <a:ea typeface="Pretendard" pitchFamily="34" charset="-122"/>
+                <a:cs typeface="Pretendard" pitchFamily="34" charset="-120"/>
+              </a:rPr>
+              <a:t>상호 확인 · 과제 안내</a:t>
+            </a:r>
+            <a:endParaRPr lang="en-US" sz="1300" dirty="0"/>
+          </a:p>
+        </p:txBody>
+      </p:sp>
+      <p:sp>
+        <p:nvSpPr>
+          <p:cNvPr id="27" name="Text 25"/>
+          <p:cNvSpPr/>
+          <p:nvPr/>
+        </p:nvSpPr>
+        <p:spPr>
+          <a:xfrm>
+            <a:off x="9265615" y="5040173"/>
+            <a:ext cx="2286000" cy="830275"/>
+          </a:xfrm>
+          <a:prstGeom prst="rect">
+            <a:avLst/>
+          </a:prstGeom>
+          <a:noFill/>
+          <a:ln/>
+        </p:spPr>
+        <p:txBody>
+          <a:bodyPr wrap="square" lIns="0" tIns="0" rIns="0" bIns="0" rtlCol="0" anchor="ctr"/>
+          <a:lstStyle/>
+          <a:p>
+            <a:pPr algn="r" indent="0" marL="0">
+              <a:buNone/>
+            </a:pPr>
+            <a:r>
+              <a:rPr lang="en-US" sz="1050" dirty="0">
+                <a:solidFill>
+                  <a:srgbClr val="6E6E6E"/>
+                </a:solidFill>
+                <a:latin typeface="Pretendard" pitchFamily="34" charset="0"/>
+                <a:ea typeface="Pretendard" pitchFamily="34" charset="-122"/>
+                <a:cs typeface="Pretendard" pitchFamily="34" charset="-120"/>
+              </a:rPr>
+              <a:t>2인 1조 + 안내</a:t>
+            </a:r>
+            <a:endParaRPr lang="en-US" sz="1050" dirty="0"/>
+          </a:p>
+        </p:txBody>
+      </p:sp>
+      <p:sp>
+        <p:nvSpPr>
+          <p:cNvPr id="28" name="Shape 26"/>
+          <p:cNvSpPr/>
+          <p:nvPr/>
+        </p:nvSpPr>
+        <p:spPr>
+          <a:xfrm>
+            <a:off x="640080" y="5852160"/>
+            <a:ext cx="10911535" cy="7315"/>
           </a:xfrm>
           <a:prstGeom prst="rect">
             <a:avLst/>
@@ -5391,88 +5636,7 @@
       </p:sp>
       <p:sp>
         <p:nvSpPr>
-          <p:cNvPr id="22" name="Text 20"/>
-          <p:cNvSpPr/>
-          <p:nvPr/>
-        </p:nvSpPr>
-        <p:spPr>
-          <a:xfrm>
-            <a:off x="1097280" y="5010912"/>
-            <a:ext cx="2743200" cy="256032"/>
-          </a:xfrm>
-          <a:prstGeom prst="rect">
-            <a:avLst/>
-          </a:prstGeom>
-          <a:noFill/>
-          <a:ln/>
-        </p:spPr>
-        <p:txBody>
-          <a:bodyPr wrap="square" lIns="0" tIns="0" rIns="0" bIns="0" rtlCol="0" anchor="ctr"/>
-          <a:lstStyle/>
-          <a:p>
-            <a:pPr indent="0" marL="0">
-              <a:buNone/>
-            </a:pPr>
-            <a:r>
-              <a:rPr lang="en-US" sz="950" spc="240" kern="0" dirty="0">
-                <a:solidFill>
-                  <a:srgbClr val="9A9A9A"/>
-                </a:solidFill>
-                <a:latin typeface="Pretendard" pitchFamily="34" charset="0"/>
-                <a:ea typeface="Pretendard" pitchFamily="34" charset="-122"/>
-                <a:cs typeface="Pretendard" pitchFamily="34" charset="-120"/>
-              </a:rPr>
-              <a:t>오늘 끝나면</a:t>
-            </a:r>
-            <a:endParaRPr lang="en-US" sz="950" dirty="0"/>
-          </a:p>
-        </p:txBody>
-      </p:sp>
-      <p:sp>
-        <p:nvSpPr>
-          <p:cNvPr id="23" name="Text 21"/>
-          <p:cNvSpPr/>
-          <p:nvPr/>
-        </p:nvSpPr>
-        <p:spPr>
-          <a:xfrm>
-            <a:off x="1097280" y="5285232"/>
-            <a:ext cx="9997135" cy="365760"/>
-          </a:xfrm>
-          <a:prstGeom prst="rect">
-            <a:avLst/>
-          </a:prstGeom>
-          <a:noFill/>
-          <a:ln/>
-        </p:spPr>
-        <p:txBody>
-          <a:bodyPr wrap="square" lIns="0" tIns="0" rIns="0" bIns="0" rtlCol="0" anchor="ctr"/>
-          <a:lstStyle/>
-          <a:p>
-            <a:pPr indent="0" marL="0">
-              <a:lnSpc>
-                <a:spcPct val="126000"/>
-              </a:lnSpc>
-              <a:buNone/>
-            </a:pPr>
-            <a:r>
-              <a:rPr lang="en-US" sz="1600" dirty="0">
-                <a:solidFill>
-                  <a:srgbClr val="FFFFFF"/>
-                </a:solidFill>
-                <a:latin typeface="Pretendard Black" pitchFamily="34" charset="0"/>
-                <a:ea typeface="Pretendard Black" pitchFamily="34" charset="-122"/>
-                <a:cs typeface="Pretendard Black" pitchFamily="34" charset="-120"/>
-              </a:rPr>
-              <a:t>컬러 3색과 타이포 3단계가 정해지고, 10주차부터 쓸 그리드가 만들어집니다.</a:t>
-            </a:r>
-            <a:endParaRPr lang="en-US" sz="1600" dirty="0"/>
-          </a:p>
-        </p:txBody>
-      </p:sp>
-      <p:sp>
-        <p:nvSpPr>
-          <p:cNvPr id="24" name="Shape 22"/>
+          <p:cNvPr id="29" name="Shape 27"/>
           <p:cNvSpPr/>
           <p:nvPr/>
         </p:nvSpPr>
@@ -5497,7 +5661,7 @@
       </p:sp>
       <p:sp>
         <p:nvSpPr>
-          <p:cNvPr id="25" name="Text 23"/>
+          <p:cNvPr id="30" name="Text 28"/>
           <p:cNvSpPr/>
           <p:nvPr/>
         </p:nvSpPr>
@@ -5536,7 +5700,7 @@
       </p:sp>
       <p:sp>
         <p:nvSpPr>
-          <p:cNvPr id="26" name="Text 24"/>
+          <p:cNvPr id="31" name="Text 29"/>
           <p:cNvSpPr/>
           <p:nvPr/>
         </p:nvSpPr>

--- a/dist/weeks-포트폴리오제작/포트폴리오제작_09주차_비주얼아이덴티티.pptx
+++ b/dist/weeks-포트폴리오제작/포트폴리오제작_09주차_비주얼아이덴티티.pptx
@@ -512,7 +512,8 @@
           <a:p>
             <a:r>
               <a:rPr lang="en-US" dirty="0"/>
-              <a:t>오늘 정한 시스템으로 10~11주에 6장을 만든다. 여기서 대충 넘어가면 페이지마다 다른 디자인이 나와 마지막에 전부 다시 손봐야 한다.</a:t>
+              <a:t>[운영 메모]
+오늘 정한 시스템으로 10~11주에 6장을 만든다. 여기서 대충 넘어가면 페이지마다 다른 디자인이 나와 마지막에 전부 다시 손봐야 한다.</a:t>
             </a:r>
             <a:endParaRPr lang="en-US" dirty="0"/>
           </a:p>
@@ -600,7 +601,8 @@
           <a:p>
             <a:r>
               <a:rPr lang="en-US" dirty="0"/>
-              <a:t>마지막 적용 테스트가 검증 장치다. 여기서 안 맞으면 10주차에 전부 다시 해야 한다.</a:t>
+              <a:t>[운영 메모]
+마지막 적용 테스트가 검증 장치다. 여기서 안 맞으면 10주차에 전부 다시 해야 한다.</a:t>
             </a:r>
             <a:endParaRPr lang="en-US" dirty="0"/>
           </a:p>
@@ -688,7 +690,8 @@
           <a:p>
             <a:r>
               <a:rPr lang="en-US" dirty="0"/>
-              <a:t>표지·소개를 미리 만들게 하면 시스템의 문제가 10주차 전에 드러난다.</a:t>
+              <a:t>[운영 메모]
+표지·소개를 미리 만들게 하면 시스템의 문제가 10주차 전에 드러난다.</a:t>
             </a:r>
             <a:endParaRPr lang="en-US" dirty="0"/>
           </a:p>
@@ -776,7 +779,8 @@
           <a:p>
             <a:r>
               <a:rPr lang="en-US" dirty="0"/>
-              <a:t>그리드 설계 30분은 짧다. 기본 그리드 템플릿(12칼럼·8칼럼)을 미리 배포하고 마진과 단 수만 조정하게 하면 시간이 맞는다.</a:t>
+              <a:t>[운영 메모]
+그리드 설계 30분은 짧다. 기본 그리드 템플릿(12칼럼·8칼럼)을 미리 배포하고 마진과 단 수만 조정하게 하면 시간이 맞는다.</a:t>
             </a:r>
             <a:endParaRPr lang="en-US" dirty="0"/>
           </a:p>
@@ -864,7 +868,8 @@
           <a:p>
             <a:r>
               <a:rPr lang="en-US" dirty="0"/>
-              <a:t>'시스템 = 판단 횟수를 줄이는 장치'라는 프레임으로 설명하면 학생들이 필요성을 이해한다.</a:t>
+              <a:t>[운영 메모]
+'시스템 = 판단 횟수를 줄이는 장치'라는 프레임으로 설명하면 학생들이 필요성을 이해한다.</a:t>
             </a:r>
             <a:endParaRPr lang="en-US" dirty="0"/>
           </a:p>
@@ -952,7 +957,8 @@
           <a:p>
             <a:r>
               <a:rPr lang="en-US" dirty="0"/>
-              <a:t>2주차 '어떤 인상으로 남을 것인가'와 연결해서 설명할 것.</a:t>
+              <a:t>[운영 메모]
+2주차 '어떤 인상으로 남을 것인가'와 연결해서 설명할 것.</a:t>
             </a:r>
             <a:endParaRPr lang="en-US" dirty="0"/>
           </a:p>
@@ -1040,7 +1046,8 @@
           <a:p>
             <a:r>
               <a:rPr lang="en-US" dirty="0"/>
-              <a:t>학생들이 배경과 장식에 힘을 주다 작업이 안 보이는 경우가 매년 나온다.</a:t>
+              <a:t>[운영 메모]
+학생들이 배경과 장식에 힘을 주다 작업이 안 보이는 경우가 매년 나온다.</a:t>
             </a:r>
             <a:endParaRPr lang="en-US" dirty="0"/>
           </a:p>
@@ -1128,7 +1135,8 @@
           <a:p>
             <a:r>
               <a:rPr lang="en-US" dirty="0"/>
-              <a:t>'강조색 하나' 원칙은 학생들이 가장 자주 어긴다. 실습 순회에서 확인할 것.</a:t>
+              <a:t>[운영 메모]
+'강조색 하나' 원칙은 학생들이 가장 자주 어긴다. 실습 순회에서 확인할 것.</a:t>
             </a:r>
             <a:endParaRPr lang="en-US" dirty="0"/>
           </a:p>
@@ -1216,7 +1224,8 @@
           <a:p>
             <a:r>
               <a:rPr lang="en-US" dirty="0"/>
-              <a:t>학생들이 서체를 3~4벌 섞는 경우가 많다. 굵기 차이로 충분하다는 점을 예시로 보일 것.</a:t>
+              <a:t>[운영 메모]
+학생들이 서체를 3~4벌 섞는 경우가 많다. 굵기 차이로 충분하다는 점을 예시로 보일 것.</a:t>
             </a:r>
             <a:endParaRPr lang="en-US" dirty="0"/>
           </a:p>
@@ -1304,7 +1313,8 @@
           <a:p>
             <a:r>
               <a:rPr lang="en-US" dirty="0"/>
-              <a:t>템플릿을 화면에 띄우고 마진·단 수를 조정해 보이며 설명.</a:t>
+              <a:t>[운영 메모]
+템플릿을 화면에 띄우고 마진·단 수를 조정해 보이며 설명.</a:t>
             </a:r>
             <a:endParaRPr lang="en-US" dirty="0"/>
           </a:p>
@@ -1392,7 +1402,8 @@
           <a:p>
             <a:r>
               <a:rPr lang="en-US" dirty="0"/>
-              <a:t>그리드를 만들고 안 쓰는 학생이 많다. 10주차 실습에서 가이드를 켜둔 채 작업하게 할 것.</a:t>
+              <a:t>[운영 메모]
+그리드를 만들고 안 쓰는 학생이 많다. 10주차 실습에서 가이드를 켜둔 채 작업하게 할 것.</a:t>
             </a:r>
             <a:endParaRPr lang="en-US" dirty="0"/>
           </a:p>
